--- a/session5/exam-strategy/q2/q2_exam_strategy.pptx
+++ b/session5/exam-strategy/q2/q2_exam_strategy.pptx
@@ -3187,8 +3187,8 @@
         </p:nvSpPr>
         <p:spPr>
           <a:xfrm>
-            <a:off x="274320" y="685800"/>
-            <a:ext cx="6400800" cy="1645920"/>
+            <a:off x="274320" y="640080"/>
+            <a:ext cx="6583680" cy="1280160"/>
           </a:xfrm>
           <a:prstGeom prst="rect">
             <a:avLst/>
@@ -3196,13 +3196,13 @@
           <a:noFill/>
         </p:spPr>
         <p:txBody>
-          <a:bodyPr wrap="square">
+          <a:bodyPr wrap="square" tIns="0" bIns="0">
             <a:spAutoFit/>
           </a:bodyPr>
           <a:lstStyle/>
           <a:p>
             <a:pPr>
-              <a:defRPr sz="1100">
+              <a:defRPr sz="900">
                 <a:solidFill>
                   <a:srgbClr val="FFFFFF"/>
                 </a:solidFill>
@@ -3223,8 +3223,8 @@
         </p:nvSpPr>
         <p:spPr>
           <a:xfrm>
-            <a:off x="365760" y="2377440"/>
-            <a:ext cx="274320" cy="274320"/>
+            <a:off x="274320" y="2057400"/>
+            <a:ext cx="201168" cy="201168"/>
           </a:xfrm>
           <a:prstGeom prst="ellipse">
             <a:avLst/>
@@ -3255,7 +3255,7 @@
           <a:lstStyle/>
           <a:p>
             <a:pPr algn="ctr">
-              <a:defRPr sz="900" b="1">
+              <a:defRPr sz="700" b="1">
                 <a:solidFill>
                   <a:srgbClr val="FFFFFF"/>
                 </a:solidFill>
@@ -3275,8 +3275,8 @@
         </p:nvSpPr>
         <p:spPr>
           <a:xfrm>
-            <a:off x="777240" y="2377440"/>
-            <a:ext cx="5943600" cy="411480"/>
+            <a:off x="548640" y="2011680"/>
+            <a:ext cx="6400800" cy="736092"/>
           </a:xfrm>
           <a:prstGeom prst="rect">
             <a:avLst/>
@@ -3284,13 +3284,13 @@
           <a:noFill/>
         </p:spPr>
         <p:txBody>
-          <a:bodyPr wrap="square">
+          <a:bodyPr wrap="square" tIns="25400" bIns="0" lIns="0">
             <a:spAutoFit/>
           </a:bodyPr>
           <a:lstStyle/>
           <a:p>
             <a:pPr>
-              <a:defRPr sz="1000">
+              <a:defRPr sz="800">
                 <a:solidFill>
                   <a:srgbClr val="CCCCCC"/>
                 </a:solidFill>
@@ -3298,7 +3298,7 @@
               </a:defRPr>
             </a:pPr>
             <a:r>
-              <a:t>Database connection details can be stored as an environment variable. However, the developer still needs to initialize t</a:t>
+              <a:t>Database connection details can be stored as an environment variable. However, the developer still n</a:t>
             </a:r>
           </a:p>
         </p:txBody>
@@ -3311,8 +3311,8 @@
         </p:nvSpPr>
         <p:spPr>
           <a:xfrm>
-            <a:off x="365760" y="2834640"/>
-            <a:ext cx="274320" cy="274320"/>
+            <a:off x="274320" y="2811780"/>
+            <a:ext cx="201168" cy="201168"/>
           </a:xfrm>
           <a:prstGeom prst="ellipse">
             <a:avLst/>
@@ -3343,7 +3343,7 @@
           <a:lstStyle/>
           <a:p>
             <a:pPr algn="ctr">
-              <a:defRPr sz="900" b="1">
+              <a:defRPr sz="700" b="1">
                 <a:solidFill>
                   <a:srgbClr val="FFFFFF"/>
                 </a:solidFill>
@@ -3363,8 +3363,8 @@
         </p:nvSpPr>
         <p:spPr>
           <a:xfrm>
-            <a:off x="777240" y="2834640"/>
-            <a:ext cx="5943600" cy="411480"/>
+            <a:off x="548640" y="2766060"/>
+            <a:ext cx="6400800" cy="736092"/>
           </a:xfrm>
           <a:prstGeom prst="rect">
             <a:avLst/>
@@ -3372,13 +3372,13 @@
           <a:noFill/>
         </p:spPr>
         <p:txBody>
-          <a:bodyPr wrap="square">
+          <a:bodyPr wrap="square" tIns="25400" bIns="0" lIns="0">
             <a:spAutoFit/>
           </a:bodyPr>
           <a:lstStyle/>
           <a:p>
             <a:pPr>
-              <a:defRPr sz="1000">
+              <a:defRPr sz="800">
                 <a:solidFill>
                   <a:srgbClr val="CCCCCC"/>
                 </a:solidFill>
@@ -3386,7 +3386,7 @@
               </a:defRPr>
             </a:pPr>
             <a:r>
-              <a:t>The Lambda environment can reuse the same database connection for subsequent invocations when defining the database conn</a:t>
+              <a:t>The Lambda environment can reuse the same database connection for subsequent invocations when defini</a:t>
             </a:r>
           </a:p>
         </p:txBody>
@@ -3399,8 +3399,8 @@
         </p:nvSpPr>
         <p:spPr>
           <a:xfrm>
-            <a:off x="365760" y="3291840"/>
-            <a:ext cx="274320" cy="274320"/>
+            <a:off x="274320" y="3566160"/>
+            <a:ext cx="201168" cy="201168"/>
           </a:xfrm>
           <a:prstGeom prst="ellipse">
             <a:avLst/>
@@ -3431,7 +3431,7 @@
           <a:lstStyle/>
           <a:p>
             <a:pPr algn="ctr">
-              <a:defRPr sz="900" b="1">
+              <a:defRPr sz="700" b="1">
                 <a:solidFill>
                   <a:srgbClr val="FFFFFF"/>
                 </a:solidFill>
@@ -3451,8 +3451,8 @@
         </p:nvSpPr>
         <p:spPr>
           <a:xfrm>
-            <a:off x="777240" y="3291840"/>
-            <a:ext cx="5943600" cy="411480"/>
+            <a:off x="548640" y="3520440"/>
+            <a:ext cx="6400800" cy="736092"/>
           </a:xfrm>
           <a:prstGeom prst="rect">
             <a:avLst/>
@@ -3460,13 +3460,13 @@
           <a:noFill/>
         </p:spPr>
         <p:txBody>
-          <a:bodyPr wrap="square">
+          <a:bodyPr wrap="square" tIns="25400" bIns="0" lIns="0">
             <a:spAutoFit/>
           </a:bodyPr>
           <a:lstStyle/>
           <a:p>
             <a:pPr>
-              <a:defRPr sz="1000">
+              <a:defRPr sz="800">
                 <a:solidFill>
                   <a:srgbClr val="CCCCCC"/>
                 </a:solidFill>
@@ -3474,7 +3474,7 @@
               </a:defRPr>
             </a:pPr>
             <a:r>
-              <a:t>Database connection details can be stored in Systems Manager Parameter Store. However, initializing the connection withi</a:t>
+              <a:t>Database connection details can be stored in Systems Manager Parameter Store. However, initializing </a:t>
             </a:r>
           </a:p>
         </p:txBody>
@@ -3487,8 +3487,8 @@
         </p:nvSpPr>
         <p:spPr>
           <a:xfrm>
-            <a:off x="365760" y="3749039"/>
-            <a:ext cx="274320" cy="274320"/>
+            <a:off x="274320" y="4320540"/>
+            <a:ext cx="201168" cy="201168"/>
           </a:xfrm>
           <a:prstGeom prst="ellipse">
             <a:avLst/>
@@ -3519,7 +3519,7 @@
           <a:lstStyle/>
           <a:p>
             <a:pPr algn="ctr">
-              <a:defRPr sz="900" b="1">
+              <a:defRPr sz="700" b="1">
                 <a:solidFill>
                   <a:srgbClr val="FFFFFF"/>
                 </a:solidFill>
@@ -3539,8 +3539,8 @@
         </p:nvSpPr>
         <p:spPr>
           <a:xfrm>
-            <a:off x="777240" y="3749039"/>
-            <a:ext cx="5943600" cy="411480"/>
+            <a:off x="548640" y="4274820"/>
+            <a:ext cx="6400800" cy="736092"/>
           </a:xfrm>
           <a:prstGeom prst="rect">
             <a:avLst/>
@@ -3548,13 +3548,13 @@
           <a:noFill/>
         </p:spPr>
         <p:txBody>
-          <a:bodyPr wrap="square">
+          <a:bodyPr wrap="square" tIns="25400" bIns="0" lIns="0">
             <a:spAutoFit/>
           </a:bodyPr>
           <a:lstStyle/>
           <a:p>
             <a:pPr>
-              <a:defRPr sz="1000">
+              <a:defRPr sz="800">
                 <a:solidFill>
                   <a:srgbClr val="CCCCCC"/>
                 </a:solidFill>
@@ -3562,7 +3562,7 @@
               </a:defRPr>
             </a:pPr>
             <a:r>
-              <a:t>Initializing the connection within the handler method will result in it re-initializing each subsequent Lambda function </a:t>
+              <a:t>Initializing the connection within the handler method will result in it re-initializing each subsequ</a:t>
             </a:r>
           </a:p>
         </p:txBody>
@@ -3844,8 +3844,8 @@
         </p:blipFill>
         <p:spPr>
           <a:xfrm>
-            <a:off x="182880" y="914400"/>
-            <a:ext cx="3228638" cy="3840480"/>
+            <a:off x="182880" y="1644673"/>
+            <a:ext cx="5303520" cy="2379932"/>
           </a:xfrm>
           <a:prstGeom prst="rect">
             <a:avLst/>
@@ -3980,9 +3980,9 @@
           <a:p>
             <a:pPr>
               <a:spcAft>
-                <a:spcPts val="600"/>
+                <a:spcPts val="400"/>
               </a:spcAft>
-              <a:defRPr sz="900">
+              <a:defRPr sz="800">
                 <a:solidFill>
                   <a:srgbClr val="212121"/>
                 </a:solidFill>
@@ -3990,15 +3990,15 @@
               </a:defRPr>
             </a:pPr>
             <a:r>
-              <a:t>• Database connection details can be stored as an environment variable.</a:t>
+              <a:t>• Database connection details can be stored as an environment variable</a:t>
             </a:r>
           </a:p>
           <a:p>
             <a:pPr>
               <a:spcAft>
-                <a:spcPts val="600"/>
+                <a:spcPts val="400"/>
               </a:spcAft>
-              <a:defRPr sz="900">
+              <a:defRPr sz="800">
                 <a:solidFill>
                   <a:srgbClr val="212121"/>
                 </a:solidFill>
@@ -4006,7 +4006,7 @@
               </a:defRPr>
             </a:pPr>
             <a:r>
-              <a:t>• However, the developer still needs to initialize the connection within the code for the connection to be used in queries.</a:t>
+              <a:t>• However, the developer still needs to initialize the connection within the code for the connection to be used in queries</a:t>
             </a:r>
           </a:p>
         </p:txBody>
@@ -4186,7 +4186,7 @@
         <p:spPr>
           <a:xfrm>
             <a:off x="182880" y="914400"/>
-            <a:ext cx="3115683" cy="3840480"/>
+            <a:ext cx="4315517" cy="3840480"/>
           </a:xfrm>
           <a:prstGeom prst="rect">
             <a:avLst/>
@@ -4321,9 +4321,9 @@
           <a:p>
             <a:pPr>
               <a:spcAft>
-                <a:spcPts val="600"/>
+                <a:spcPts val="400"/>
               </a:spcAft>
-              <a:defRPr sz="900">
+              <a:defRPr sz="800">
                 <a:solidFill>
                   <a:srgbClr val="212121"/>
                 </a:solidFill>
@@ -4331,7 +4331,7 @@
               </a:defRPr>
             </a:pPr>
             <a:r>
-              <a:t>• The Lambda environment can reuse the same database connection for subsequent invocations when defining the database connection details in the code but outside the handler method.</a:t>
+              <a:t>• The Lambda environment can reuse the same database connection for subsequent invocations when defining the database connection details in the code but outside the handler method</a:t>
             </a:r>
           </a:p>
         </p:txBody>
@@ -4510,8 +4510,8 @@
         </p:blipFill>
         <p:spPr>
           <a:xfrm>
-            <a:off x="182880" y="914400"/>
-            <a:ext cx="5280660" cy="3840480"/>
+            <a:off x="182880" y="1699871"/>
+            <a:ext cx="5303520" cy="2269537"/>
           </a:xfrm>
           <a:prstGeom prst="rect">
             <a:avLst/>
@@ -4646,9 +4646,9 @@
           <a:p>
             <a:pPr>
               <a:spcAft>
-                <a:spcPts val="600"/>
+                <a:spcPts val="400"/>
               </a:spcAft>
-              <a:defRPr sz="900">
+              <a:defRPr sz="800">
                 <a:solidFill>
                   <a:srgbClr val="212121"/>
                 </a:solidFill>
@@ -4656,15 +4656,15 @@
               </a:defRPr>
             </a:pPr>
             <a:r>
-              <a:t>• Database connection details can be stored in Systems Manager Parameter Store.</a:t>
+              <a:t>• Database connection details can be stored in Systems Manager Parameter Store</a:t>
             </a:r>
           </a:p>
           <a:p>
             <a:pPr>
               <a:spcAft>
-                <a:spcPts val="600"/>
+                <a:spcPts val="400"/>
               </a:spcAft>
-              <a:defRPr sz="900">
+              <a:defRPr sz="800">
                 <a:solidFill>
                   <a:srgbClr val="212121"/>
                 </a:solidFill>
@@ -4672,7 +4672,7 @@
               </a:defRPr>
             </a:pPr>
             <a:r>
-              <a:t>• However, initializing the connection within the handler method will result in it re-initializing each subsequent Lambda function invocation.</a:t>
+              <a:t>• However, initializing the connection within the handler method will result in it re-initializing each subsequent Lambda function invocation</a:t>
             </a:r>
           </a:p>
         </p:txBody>
@@ -4851,8 +4851,8 @@
         </p:blipFill>
         <p:spPr>
           <a:xfrm>
-            <a:off x="182880" y="914400"/>
-            <a:ext cx="3238051" cy="3840480"/>
+            <a:off x="182880" y="1645866"/>
+            <a:ext cx="5303520" cy="2377547"/>
           </a:xfrm>
           <a:prstGeom prst="rect">
             <a:avLst/>
@@ -4987,9 +4987,9 @@
           <a:p>
             <a:pPr>
               <a:spcAft>
-                <a:spcPts val="600"/>
+                <a:spcPts val="400"/>
               </a:spcAft>
-              <a:defRPr sz="900">
+              <a:defRPr sz="800">
                 <a:solidFill>
                   <a:srgbClr val="212121"/>
                 </a:solidFill>
@@ -4997,7 +4997,7 @@
               </a:defRPr>
             </a:pPr>
             <a:r>
-              <a:t>• Initializing the connection within the handler method will result in it re-initializing each subsequent Lambda function invocation.</a:t>
+              <a:t>• Initializing the connection within the handler method will result in it re-initializing each subsequent Lambda function invocation</a:t>
             </a:r>
           </a:p>
         </p:txBody>

--- a/session5/exam-strategy/q2/q2_exam_strategy.pptx
+++ b/session5/exam-strategy/q2/q2_exam_strategy.pptx
@@ -3187,8 +3187,8 @@
         </p:nvSpPr>
         <p:spPr>
           <a:xfrm>
-            <a:off x="274320" y="640080"/>
-            <a:ext cx="6583680" cy="1280160"/>
+            <a:off x="274320" y="685800"/>
+            <a:ext cx="6400800" cy="1645920"/>
           </a:xfrm>
           <a:prstGeom prst="rect">
             <a:avLst/>
@@ -3196,13 +3196,13 @@
           <a:noFill/>
         </p:spPr>
         <p:txBody>
-          <a:bodyPr wrap="square" tIns="0" bIns="0">
+          <a:bodyPr wrap="square">
             <a:spAutoFit/>
           </a:bodyPr>
           <a:lstStyle/>
           <a:p>
             <a:pPr>
-              <a:defRPr sz="900">
+              <a:defRPr sz="1100">
                 <a:solidFill>
                   <a:srgbClr val="FFFFFF"/>
                 </a:solidFill>
@@ -3223,8 +3223,8 @@
         </p:nvSpPr>
         <p:spPr>
           <a:xfrm>
-            <a:off x="274320" y="2057400"/>
-            <a:ext cx="201168" cy="201168"/>
+            <a:off x="365760" y="2377440"/>
+            <a:ext cx="274320" cy="274320"/>
           </a:xfrm>
           <a:prstGeom prst="ellipse">
             <a:avLst/>
@@ -3255,7 +3255,7 @@
           <a:lstStyle/>
           <a:p>
             <a:pPr algn="ctr">
-              <a:defRPr sz="700" b="1">
+              <a:defRPr sz="900" b="1">
                 <a:solidFill>
                   <a:srgbClr val="FFFFFF"/>
                 </a:solidFill>
@@ -3275,8 +3275,8 @@
         </p:nvSpPr>
         <p:spPr>
           <a:xfrm>
-            <a:off x="548640" y="2011680"/>
-            <a:ext cx="6400800" cy="736092"/>
+            <a:off x="777240" y="2377440"/>
+            <a:ext cx="5943600" cy="411480"/>
           </a:xfrm>
           <a:prstGeom prst="rect">
             <a:avLst/>
@@ -3284,13 +3284,13 @@
           <a:noFill/>
         </p:spPr>
         <p:txBody>
-          <a:bodyPr wrap="square" tIns="25400" bIns="0" lIns="0">
+          <a:bodyPr wrap="square">
             <a:spAutoFit/>
           </a:bodyPr>
           <a:lstStyle/>
           <a:p>
             <a:pPr>
-              <a:defRPr sz="800">
+              <a:defRPr sz="1000">
                 <a:solidFill>
                   <a:srgbClr val="CCCCCC"/>
                 </a:solidFill>
@@ -3298,7 +3298,7 @@
               </a:defRPr>
             </a:pPr>
             <a:r>
-              <a:t>Database connection details can be stored as an environment variable. However, the developer still n</a:t>
+              <a:t>Database connection details can be stored as an environment variable. However, the developer still needs to initialize t</a:t>
             </a:r>
           </a:p>
         </p:txBody>
@@ -3311,8 +3311,8 @@
         </p:nvSpPr>
         <p:spPr>
           <a:xfrm>
-            <a:off x="274320" y="2811780"/>
-            <a:ext cx="201168" cy="201168"/>
+            <a:off x="365760" y="2834640"/>
+            <a:ext cx="274320" cy="274320"/>
           </a:xfrm>
           <a:prstGeom prst="ellipse">
             <a:avLst/>
@@ -3343,7 +3343,7 @@
           <a:lstStyle/>
           <a:p>
             <a:pPr algn="ctr">
-              <a:defRPr sz="700" b="1">
+              <a:defRPr sz="900" b="1">
                 <a:solidFill>
                   <a:srgbClr val="FFFFFF"/>
                 </a:solidFill>
@@ -3363,8 +3363,8 @@
         </p:nvSpPr>
         <p:spPr>
           <a:xfrm>
-            <a:off x="548640" y="2766060"/>
-            <a:ext cx="6400800" cy="736092"/>
+            <a:off x="777240" y="2834640"/>
+            <a:ext cx="5943600" cy="411480"/>
           </a:xfrm>
           <a:prstGeom prst="rect">
             <a:avLst/>
@@ -3372,13 +3372,13 @@
           <a:noFill/>
         </p:spPr>
         <p:txBody>
-          <a:bodyPr wrap="square" tIns="25400" bIns="0" lIns="0">
+          <a:bodyPr wrap="square">
             <a:spAutoFit/>
           </a:bodyPr>
           <a:lstStyle/>
           <a:p>
             <a:pPr>
-              <a:defRPr sz="800">
+              <a:defRPr sz="1000">
                 <a:solidFill>
                   <a:srgbClr val="CCCCCC"/>
                 </a:solidFill>
@@ -3386,7 +3386,7 @@
               </a:defRPr>
             </a:pPr>
             <a:r>
-              <a:t>The Lambda environment can reuse the same database connection for subsequent invocations when defini</a:t>
+              <a:t>The Lambda environment can reuse the same database connection for subsequent invocations when defining the database conn</a:t>
             </a:r>
           </a:p>
         </p:txBody>
@@ -3399,8 +3399,8 @@
         </p:nvSpPr>
         <p:spPr>
           <a:xfrm>
-            <a:off x="274320" y="3566160"/>
-            <a:ext cx="201168" cy="201168"/>
+            <a:off x="365760" y="3291840"/>
+            <a:ext cx="274320" cy="274320"/>
           </a:xfrm>
           <a:prstGeom prst="ellipse">
             <a:avLst/>
@@ -3431,7 +3431,7 @@
           <a:lstStyle/>
           <a:p>
             <a:pPr algn="ctr">
-              <a:defRPr sz="700" b="1">
+              <a:defRPr sz="900" b="1">
                 <a:solidFill>
                   <a:srgbClr val="FFFFFF"/>
                 </a:solidFill>
@@ -3451,8 +3451,8 @@
         </p:nvSpPr>
         <p:spPr>
           <a:xfrm>
-            <a:off x="548640" y="3520440"/>
-            <a:ext cx="6400800" cy="736092"/>
+            <a:off x="777240" y="3291840"/>
+            <a:ext cx="5943600" cy="411480"/>
           </a:xfrm>
           <a:prstGeom prst="rect">
             <a:avLst/>
@@ -3460,13 +3460,13 @@
           <a:noFill/>
         </p:spPr>
         <p:txBody>
-          <a:bodyPr wrap="square" tIns="25400" bIns="0" lIns="0">
+          <a:bodyPr wrap="square">
             <a:spAutoFit/>
           </a:bodyPr>
           <a:lstStyle/>
           <a:p>
             <a:pPr>
-              <a:defRPr sz="800">
+              <a:defRPr sz="1000">
                 <a:solidFill>
                   <a:srgbClr val="CCCCCC"/>
                 </a:solidFill>
@@ -3474,7 +3474,7 @@
               </a:defRPr>
             </a:pPr>
             <a:r>
-              <a:t>Database connection details can be stored in Systems Manager Parameter Store. However, initializing </a:t>
+              <a:t>Database connection details can be stored in Systems Manager Parameter Store. However, initializing the connection withi</a:t>
             </a:r>
           </a:p>
         </p:txBody>
@@ -3487,8 +3487,8 @@
         </p:nvSpPr>
         <p:spPr>
           <a:xfrm>
-            <a:off x="274320" y="4320540"/>
-            <a:ext cx="201168" cy="201168"/>
+            <a:off x="365760" y="3749039"/>
+            <a:ext cx="274320" cy="274320"/>
           </a:xfrm>
           <a:prstGeom prst="ellipse">
             <a:avLst/>
@@ -3519,7 +3519,7 @@
           <a:lstStyle/>
           <a:p>
             <a:pPr algn="ctr">
-              <a:defRPr sz="700" b="1">
+              <a:defRPr sz="900" b="1">
                 <a:solidFill>
                   <a:srgbClr val="FFFFFF"/>
                 </a:solidFill>
@@ -3539,8 +3539,8 @@
         </p:nvSpPr>
         <p:spPr>
           <a:xfrm>
-            <a:off x="548640" y="4274820"/>
-            <a:ext cx="6400800" cy="736092"/>
+            <a:off x="777240" y="3749039"/>
+            <a:ext cx="5943600" cy="411480"/>
           </a:xfrm>
           <a:prstGeom prst="rect">
             <a:avLst/>
@@ -3548,13 +3548,13 @@
           <a:noFill/>
         </p:spPr>
         <p:txBody>
-          <a:bodyPr wrap="square" tIns="25400" bIns="0" lIns="0">
+          <a:bodyPr wrap="square">
             <a:spAutoFit/>
           </a:bodyPr>
           <a:lstStyle/>
           <a:p>
             <a:pPr>
-              <a:defRPr sz="800">
+              <a:defRPr sz="1000">
                 <a:solidFill>
                   <a:srgbClr val="CCCCCC"/>
                 </a:solidFill>
@@ -3562,7 +3562,7 @@
               </a:defRPr>
             </a:pPr>
             <a:r>
-              <a:t>Initializing the connection within the handler method will result in it re-initializing each subsequ</a:t>
+              <a:t>Initializing the connection within the handler method will result in it re-initializing each subsequent Lambda function </a:t>
             </a:r>
           </a:p>
         </p:txBody>
@@ -3844,8 +3844,8 @@
         </p:blipFill>
         <p:spPr>
           <a:xfrm>
-            <a:off x="182880" y="1644673"/>
-            <a:ext cx="5303520" cy="2379932"/>
+            <a:off x="182880" y="1602011"/>
+            <a:ext cx="5303520" cy="2465257"/>
           </a:xfrm>
           <a:prstGeom prst="rect">
             <a:avLst/>
@@ -3980,9 +3980,9 @@
           <a:p>
             <a:pPr>
               <a:spcAft>
-                <a:spcPts val="400"/>
+                <a:spcPts val="600"/>
               </a:spcAft>
-              <a:defRPr sz="800">
+              <a:defRPr sz="900">
                 <a:solidFill>
                   <a:srgbClr val="212121"/>
                 </a:solidFill>
@@ -3990,15 +3990,15 @@
               </a:defRPr>
             </a:pPr>
             <a:r>
-              <a:t>• Database connection details can be stored as an environment variable</a:t>
+              <a:t>• Database connection details can be stored as an environment variable.</a:t>
             </a:r>
           </a:p>
           <a:p>
             <a:pPr>
               <a:spcAft>
-                <a:spcPts val="400"/>
+                <a:spcPts val="600"/>
               </a:spcAft>
-              <a:defRPr sz="800">
+              <a:defRPr sz="900">
                 <a:solidFill>
                   <a:srgbClr val="212121"/>
                 </a:solidFill>
@@ -4006,7 +4006,7 @@
               </a:defRPr>
             </a:pPr>
             <a:r>
-              <a:t>• However, the developer still needs to initialize the connection within the code for the connection to be used in queries</a:t>
+              <a:t>• However, the developer still needs to initialize the connection within the code for the connection to be used in queries.</a:t>
             </a:r>
           </a:p>
         </p:txBody>
@@ -4185,8 +4185,8 @@
         </p:blipFill>
         <p:spPr>
           <a:xfrm>
-            <a:off x="182880" y="914400"/>
-            <a:ext cx="4315517" cy="3840480"/>
+            <a:off x="182880" y="1708694"/>
+            <a:ext cx="5303520" cy="2251891"/>
           </a:xfrm>
           <a:prstGeom prst="rect">
             <a:avLst/>
@@ -4321,9 +4321,9 @@
           <a:p>
             <a:pPr>
               <a:spcAft>
-                <a:spcPts val="400"/>
+                <a:spcPts val="600"/>
               </a:spcAft>
-              <a:defRPr sz="800">
+              <a:defRPr sz="900">
                 <a:solidFill>
                   <a:srgbClr val="212121"/>
                 </a:solidFill>
@@ -4331,7 +4331,7 @@
               </a:defRPr>
             </a:pPr>
             <a:r>
-              <a:t>• The Lambda environment can reuse the same database connection for subsequent invocations when defining the database connection details in the code but outside the handler method</a:t>
+              <a:t>• The Lambda environment can reuse the same database connection for subsequent invocations when defining the database connection details in the code but outside the handler method.</a:t>
             </a:r>
           </a:p>
         </p:txBody>
@@ -4510,8 +4510,8 @@
         </p:blipFill>
         <p:spPr>
           <a:xfrm>
-            <a:off x="182880" y="1699871"/>
-            <a:ext cx="5303520" cy="2269537"/>
+            <a:off x="182880" y="1643961"/>
+            <a:ext cx="5303520" cy="2381357"/>
           </a:xfrm>
           <a:prstGeom prst="rect">
             <a:avLst/>
@@ -4646,9 +4646,9 @@
           <a:p>
             <a:pPr>
               <a:spcAft>
-                <a:spcPts val="400"/>
+                <a:spcPts val="600"/>
               </a:spcAft>
-              <a:defRPr sz="800">
+              <a:defRPr sz="900">
                 <a:solidFill>
                   <a:srgbClr val="212121"/>
                 </a:solidFill>
@@ -4656,15 +4656,15 @@
               </a:defRPr>
             </a:pPr>
             <a:r>
-              <a:t>• Database connection details can be stored in Systems Manager Parameter Store</a:t>
+              <a:t>• Database connection details can be stored in Systems Manager Parameter Store.</a:t>
             </a:r>
           </a:p>
           <a:p>
             <a:pPr>
               <a:spcAft>
-                <a:spcPts val="400"/>
+                <a:spcPts val="600"/>
               </a:spcAft>
-              <a:defRPr sz="800">
+              <a:defRPr sz="900">
                 <a:solidFill>
                   <a:srgbClr val="212121"/>
                 </a:solidFill>
@@ -4672,7 +4672,7 @@
               </a:defRPr>
             </a:pPr>
             <a:r>
-              <a:t>• However, initializing the connection within the handler method will result in it re-initializing each subsequent Lambda function invocation</a:t>
+              <a:t>• However, initializing the connection within the handler method will result in it re-initializing each subsequent Lambda function invocation.</a:t>
             </a:r>
           </a:p>
         </p:txBody>
@@ -4851,8 +4851,8 @@
         </p:blipFill>
         <p:spPr>
           <a:xfrm>
-            <a:off x="182880" y="1645866"/>
-            <a:ext cx="5303520" cy="2377547"/>
+            <a:off x="182880" y="914400"/>
+            <a:ext cx="2731008" cy="3840480"/>
           </a:xfrm>
           <a:prstGeom prst="rect">
             <a:avLst/>
@@ -4987,9 +4987,9 @@
           <a:p>
             <a:pPr>
               <a:spcAft>
-                <a:spcPts val="400"/>
+                <a:spcPts val="600"/>
               </a:spcAft>
-              <a:defRPr sz="800">
+              <a:defRPr sz="900">
                 <a:solidFill>
                   <a:srgbClr val="212121"/>
                 </a:solidFill>
@@ -4997,7 +4997,7 @@
               </a:defRPr>
             </a:pPr>
             <a:r>
-              <a:t>• Initializing the connection within the handler method will result in it re-initializing each subsequent Lambda function invocation</a:t>
+              <a:t>• Initializing the connection within the handler method will result in it re-initializing each subsequent Lambda function invocation.</a:t>
             </a:r>
           </a:p>
         </p:txBody>
